--- a/metro/metro-s05-market-update.pptx
+++ b/metro/metro-s05-market-update.pptx
@@ -4218,9 +4218,9 @@
                 <a:solidFill>
                   <a:srgbClr val="14161A"/>
                 </a:solidFill>
-                <a:latin typeface="Space Grotesk"/>
-                <a:ea typeface="Space Grotesk"/>
-                <a:cs typeface="Space Grotesk"/>
+                <a:latin typeface="HK Grotesk"/>
+                <a:ea typeface="HK Grotesk"/>
+                <a:cs typeface="HK Grotesk"/>
               </a:rPr>
               <a:t>NO</a:t>
             </a:r>
@@ -4327,9 +4327,9 @@
                 <a:solidFill>
                   <a:srgbClr val="14161A"/>
                 </a:solidFill>
-                <a:latin typeface="Space Grotesk"/>
-                <a:ea typeface="Space Grotesk"/>
-                <a:cs typeface="Space Grotesk"/>
+                <a:latin typeface="HK Grotesk"/>
+                <a:ea typeface="HK Grotesk"/>
+                <a:cs typeface="HK Grotesk"/>
               </a:rPr>
               <a:t>Chicago,</a:t>
             </a:r>
@@ -4366,9 +4366,9 @@
                 <a:solidFill>
                   <a:srgbClr val="14161A"/>
                 </a:solidFill>
-                <a:latin typeface="Space Grotesk"/>
-                <a:ea typeface="Space Grotesk"/>
-                <a:cs typeface="Space Grotesk"/>
+                <a:latin typeface="HK Grotesk"/>
+                <a:ea typeface="HK Grotesk"/>
+                <a:cs typeface="HK Grotesk"/>
               </a:rPr>
               <a:t>by the numbers.</a:t>
             </a:r>
@@ -4401,9 +4401,9 @@
                 <a:solidFill>
                   <a:srgbClr val="2D5BE3"/>
                 </a:solidFill>
-                <a:latin typeface="Space Grotesk"/>
-                <a:ea typeface="Space Grotesk"/>
-                <a:cs typeface="Space Grotesk"/>
+                <a:latin typeface="HK Grotesk"/>
+                <a:ea typeface="HK Grotesk"/>
+                <a:cs typeface="HK Grotesk"/>
               </a:rPr>
               <a:t>01</a:t>
             </a:r>
@@ -4475,9 +4475,9 @@
                 <a:solidFill>
                   <a:srgbClr val="14161A"/>
                 </a:solidFill>
-                <a:latin typeface="Space Grotesk"/>
-                <a:ea typeface="Space Grotesk"/>
-                <a:cs typeface="Space Grotesk"/>
+                <a:latin typeface="HK Grotesk"/>
+                <a:ea typeface="HK Grotesk"/>
+                <a:cs typeface="HK Grotesk"/>
               </a:rPr>
               <a:t>$1.12M</a:t>
             </a:r>
@@ -4510,9 +4510,9 @@
                 <a:solidFill>
                   <a:srgbClr val="2D5BE3"/>
                 </a:solidFill>
-                <a:latin typeface="Space Grotesk"/>
-                <a:ea typeface="Space Grotesk"/>
-                <a:cs typeface="Space Grotesk"/>
+                <a:latin typeface="HK Grotesk"/>
+                <a:ea typeface="HK Grotesk"/>
+                <a:cs typeface="HK Grotesk"/>
               </a:rPr>
               <a:t>+ 2.8%</a:t>
             </a:r>
@@ -4545,9 +4545,9 @@
                 <a:solidFill>
                   <a:srgbClr val="2D5BE3"/>
                 </a:solidFill>
-                <a:latin typeface="Space Grotesk"/>
-                <a:ea typeface="Space Grotesk"/>
-                <a:cs typeface="Space Grotesk"/>
+                <a:latin typeface="HK Grotesk"/>
+                <a:ea typeface="HK Grotesk"/>
+                <a:cs typeface="HK Grotesk"/>
               </a:rPr>
               <a:t>02</a:t>
             </a:r>
@@ -4619,9 +4619,9 @@
                 <a:solidFill>
                   <a:srgbClr val="14161A"/>
                 </a:solidFill>
-                <a:latin typeface="Space Grotesk"/>
-                <a:ea typeface="Space Grotesk"/>
-                <a:cs typeface="Space Grotesk"/>
+                <a:latin typeface="HK Grotesk"/>
+                <a:ea typeface="HK Grotesk"/>
+                <a:cs typeface="HK Grotesk"/>
               </a:rPr>
               <a:t>24</a:t>
             </a:r>
@@ -4654,9 +4654,9 @@
                 <a:solidFill>
                   <a:srgbClr val="2D5BE3"/>
                 </a:solidFill>
-                <a:latin typeface="Space Grotesk"/>
-                <a:ea typeface="Space Grotesk"/>
-                <a:cs typeface="Space Grotesk"/>
+                <a:latin typeface="HK Grotesk"/>
+                <a:ea typeface="HK Grotesk"/>
+                <a:cs typeface="HK Grotesk"/>
               </a:rPr>
               <a:t>− 9 days</a:t>
             </a:r>
@@ -4689,9 +4689,9 @@
                 <a:solidFill>
                   <a:srgbClr val="2D5BE3"/>
                 </a:solidFill>
-                <a:latin typeface="Space Grotesk"/>
-                <a:ea typeface="Space Grotesk"/>
-                <a:cs typeface="Space Grotesk"/>
+                <a:latin typeface="HK Grotesk"/>
+                <a:ea typeface="HK Grotesk"/>
+                <a:cs typeface="HK Grotesk"/>
               </a:rPr>
               <a:t>03</a:t>
             </a:r>
@@ -4763,9 +4763,9 @@
                 <a:solidFill>
                   <a:srgbClr val="14161A"/>
                 </a:solidFill>
-                <a:latin typeface="Space Grotesk"/>
-                <a:ea typeface="Space Grotesk"/>
-                <a:cs typeface="Space Grotesk"/>
+                <a:latin typeface="HK Grotesk"/>
+                <a:ea typeface="HK Grotesk"/>
+                <a:cs typeface="HK Grotesk"/>
               </a:rPr>
               <a:t>188</a:t>
             </a:r>
@@ -4798,9 +4798,9 @@
                 <a:solidFill>
                   <a:srgbClr val="2D5BE3"/>
                 </a:solidFill>
-                <a:latin typeface="Space Grotesk"/>
-                <a:ea typeface="Space Grotesk"/>
-                <a:cs typeface="Space Grotesk"/>
+                <a:latin typeface="HK Grotesk"/>
+                <a:ea typeface="HK Grotesk"/>
+                <a:cs typeface="HK Grotesk"/>
               </a:rPr>
               <a:t>+ 14</a:t>
             </a:r>
@@ -4833,9 +4833,9 @@
                 <a:solidFill>
                   <a:srgbClr val="14161A"/>
                 </a:solidFill>
-                <a:latin typeface="Space Grotesk"/>
-                <a:ea typeface="Space Grotesk"/>
-                <a:cs typeface="Space Grotesk"/>
+                <a:latin typeface="HK Grotesk"/>
+                <a:ea typeface="HK Grotesk"/>
+                <a:cs typeface="HK Grotesk"/>
               </a:rPr>
               <a:t>Full report — tap here</a:t>
             </a:r>
@@ -4868,9 +4868,9 @@
                 <a:solidFill>
                   <a:srgbClr val="2D5BE3"/>
                 </a:solidFill>
-                <a:latin typeface="Space Grotesk"/>
-                <a:ea typeface="Space Grotesk"/>
-                <a:cs typeface="Space Grotesk"/>
+                <a:latin typeface="HK Grotesk"/>
+                <a:ea typeface="HK Grotesk"/>
+                <a:cs typeface="HK Grotesk"/>
               </a:rPr>
               <a:t>↗</a:t>
             </a:r>

--- a/metro/metro-s05-market-update.pptx
+++ b/metro/metro-s05-market-update.pptx
@@ -3316,8 +3316,8 @@
         </p:nvSpPr>
         <p:spPr>
           <a:xfrm>
-            <a:off x="762000" y="5345906"/>
-            <a:ext cx="8763000" cy="1381125"/>
+            <a:off x="762000" y="5441156"/>
+            <a:ext cx="8763000" cy="1457325"/>
           </a:xfrm>
           <a:prstGeom prst="rect">
             <a:avLst/>
@@ -3360,7 +3360,7 @@
         </p:nvSpPr>
         <p:spPr>
           <a:xfrm>
-            <a:off x="762000" y="5345906"/>
+            <a:off x="762000" y="5441156"/>
             <a:ext cx="8763000" cy="9525"/>
           </a:xfrm>
           <a:prstGeom prst="rect">
@@ -3404,7 +3404,7 @@
         </p:nvSpPr>
         <p:spPr>
           <a:xfrm>
-            <a:off x="762000" y="6717506"/>
+            <a:off x="762000" y="6888956"/>
             <a:ext cx="8763000" cy="9525"/>
           </a:xfrm>
           <a:prstGeom prst="rect">
@@ -3448,8 +3448,8 @@
         </p:nvSpPr>
         <p:spPr>
           <a:xfrm>
-            <a:off x="762000" y="5345906"/>
-            <a:ext cx="9525" cy="1381125"/>
+            <a:off x="762000" y="5441156"/>
+            <a:ext cx="9525" cy="1457325"/>
           </a:xfrm>
           <a:prstGeom prst="rect">
             <a:avLst/>
@@ -3492,8 +3492,8 @@
         </p:nvSpPr>
         <p:spPr>
           <a:xfrm>
-            <a:off x="9515475" y="5345906"/>
-            <a:ext cx="9525" cy="1381125"/>
+            <a:off x="9515475" y="5441156"/>
+            <a:ext cx="9525" cy="1457325"/>
           </a:xfrm>
           <a:prstGeom prst="rect">
             <a:avLst/>
@@ -3536,8 +3536,8 @@
         </p:nvSpPr>
         <p:spPr>
           <a:xfrm>
-            <a:off x="762000" y="6898481"/>
-            <a:ext cx="8763000" cy="1381125"/>
+            <a:off x="762000" y="7069931"/>
+            <a:ext cx="8763000" cy="1457325"/>
           </a:xfrm>
           <a:prstGeom prst="rect">
             <a:avLst/>
@@ -3580,7 +3580,7 @@
         </p:nvSpPr>
         <p:spPr>
           <a:xfrm>
-            <a:off x="762000" y="6898481"/>
+            <a:off x="762000" y="7069931"/>
             <a:ext cx="8763000" cy="9525"/>
           </a:xfrm>
           <a:prstGeom prst="rect">
@@ -3624,7 +3624,7 @@
         </p:nvSpPr>
         <p:spPr>
           <a:xfrm>
-            <a:off x="762000" y="8270081"/>
+            <a:off x="762000" y="8517731"/>
             <a:ext cx="8763000" cy="9525"/>
           </a:xfrm>
           <a:prstGeom prst="rect">
@@ -3668,8 +3668,8 @@
         </p:nvSpPr>
         <p:spPr>
           <a:xfrm>
-            <a:off x="762000" y="6898481"/>
-            <a:ext cx="9525" cy="1381125"/>
+            <a:off x="762000" y="7069931"/>
+            <a:ext cx="9525" cy="1457325"/>
           </a:xfrm>
           <a:prstGeom prst="rect">
             <a:avLst/>
@@ -3712,8 +3712,8 @@
         </p:nvSpPr>
         <p:spPr>
           <a:xfrm>
-            <a:off x="9515475" y="6898481"/>
-            <a:ext cx="9525" cy="1381125"/>
+            <a:off x="9515475" y="7069931"/>
+            <a:ext cx="9525" cy="1457325"/>
           </a:xfrm>
           <a:prstGeom prst="rect">
             <a:avLst/>
@@ -3756,8 +3756,8 @@
         </p:nvSpPr>
         <p:spPr>
           <a:xfrm>
-            <a:off x="762000" y="8451056"/>
-            <a:ext cx="8763000" cy="1381125"/>
+            <a:off x="762000" y="8698706"/>
+            <a:ext cx="8763000" cy="1457325"/>
           </a:xfrm>
           <a:prstGeom prst="rect">
             <a:avLst/>
@@ -3800,7 +3800,7 @@
         </p:nvSpPr>
         <p:spPr>
           <a:xfrm>
-            <a:off x="762000" y="8451056"/>
+            <a:off x="762000" y="8698706"/>
             <a:ext cx="8763000" cy="9525"/>
           </a:xfrm>
           <a:prstGeom prst="rect">
@@ -3844,7 +3844,7 @@
         </p:nvSpPr>
         <p:spPr>
           <a:xfrm>
-            <a:off x="762000" y="9822656"/>
+            <a:off x="762000" y="10146506"/>
             <a:ext cx="8763000" cy="9525"/>
           </a:xfrm>
           <a:prstGeom prst="rect">
@@ -3888,8 +3888,8 @@
         </p:nvSpPr>
         <p:spPr>
           <a:xfrm>
-            <a:off x="762000" y="8451056"/>
-            <a:ext cx="9525" cy="1381125"/>
+            <a:off x="762000" y="8698706"/>
+            <a:ext cx="9525" cy="1457325"/>
           </a:xfrm>
           <a:prstGeom prst="rect">
             <a:avLst/>
@@ -3932,8 +3932,8 @@
         </p:nvSpPr>
         <p:spPr>
           <a:xfrm>
-            <a:off x="9515475" y="8451056"/>
-            <a:ext cx="9525" cy="1381125"/>
+            <a:off x="9515475" y="8698706"/>
+            <a:ext cx="9525" cy="1457325"/>
           </a:xfrm>
           <a:prstGeom prst="rect">
             <a:avLst/>
@@ -3976,7 +3976,7 @@
         </p:nvSpPr>
         <p:spPr>
           <a:xfrm>
-            <a:off x="762000" y="15735300"/>
+            <a:off x="762000" y="15525750"/>
             <a:ext cx="8763000" cy="9525"/>
           </a:xfrm>
           <a:prstGeom prst="rect">
@@ -4064,8 +4064,8 @@
         </p:nvSpPr>
         <p:spPr>
           <a:xfrm>
-            <a:off x="762000" y="15735300"/>
-            <a:ext cx="9525" cy="647700"/>
+            <a:off x="762000" y="15525750"/>
+            <a:ext cx="9525" cy="857250"/>
           </a:xfrm>
           <a:prstGeom prst="rect">
             <a:avLst/>
@@ -4108,8 +4108,8 @@
         </p:nvSpPr>
         <p:spPr>
           <a:xfrm>
-            <a:off x="9515475" y="15735300"/>
-            <a:ext cx="9525" cy="647700"/>
+            <a:off x="9515475" y="15525750"/>
+            <a:ext cx="9525" cy="857250"/>
           </a:xfrm>
           <a:prstGeom prst="rect">
             <a:avLst/>
@@ -4152,7 +4152,7 @@
         </p:nvSpPr>
         <p:spPr>
           <a:xfrm>
-            <a:off x="1024416" y="16012004"/>
+            <a:off x="1081566" y="15907229"/>
             <a:ext cx="94293" cy="94292"/>
           </a:xfrm>
           <a:prstGeom prst="rect">
@@ -4218,9 +4218,9 @@
                 <a:solidFill>
                   <a:srgbClr val="14161A"/>
                 </a:solidFill>
-                <a:latin typeface="HK Grotesk"/>
-                <a:ea typeface="HK Grotesk"/>
-                <a:cs typeface="HK Grotesk"/>
+                <a:latin typeface="Space Grotesk"/>
+                <a:ea typeface="Space Grotesk"/>
+                <a:cs typeface="Space Grotesk"/>
               </a:rPr>
               <a:t>NO</a:t>
             </a:r>
@@ -4235,8 +4235,8 @@
         </p:nvSpPr>
         <p:spPr>
           <a:xfrm>
-            <a:off x="7680573" y="938212"/>
-            <a:ext cx="3332083" cy="104775"/>
+            <a:off x="6574036" y="900112"/>
+            <a:ext cx="5102542" cy="180975"/>
           </a:xfrm>
           <a:prstGeom prst="rect">
             <a:avLst/>
@@ -4249,7 +4249,7 @@
           <a:p>
             <a:pPr algn="l"/>
             <a:r>
-              <a:rPr sz="750" i="0" b="0" spc="240">
+              <a:rPr sz="1200" i="0" b="0" spc="384">
                 <a:solidFill>
                   <a:srgbClr val="8A8F99"/>
                 </a:solidFill>
@@ -4271,7 +4271,7 @@
         <p:spPr>
           <a:xfrm>
             <a:off x="762000" y="2857500"/>
-            <a:ext cx="14401800" cy="133350"/>
+            <a:ext cx="14401800" cy="228600"/>
           </a:xfrm>
           <a:prstGeom prst="rect">
             <a:avLst/>
@@ -4284,7 +4284,7 @@
           <a:p>
             <a:pPr algn="l"/>
             <a:r>
-              <a:rPr sz="900" i="0" b="0" spc="324">
+              <a:rPr sz="1575" i="0" b="0" spc="472">
                 <a:solidFill>
                   <a:srgbClr val="2D5BE3"/>
                 </a:solidFill>
@@ -4305,7 +4305,7 @@
         </p:nvSpPr>
         <p:spPr>
           <a:xfrm>
-            <a:off x="762000" y="3076575"/>
+            <a:off x="762000" y="3171825"/>
             <a:ext cx="5852874" cy="971550"/>
           </a:xfrm>
           <a:prstGeom prst="rect">
@@ -4327,9 +4327,9 @@
                 <a:solidFill>
                   <a:srgbClr val="14161A"/>
                 </a:solidFill>
-                <a:latin typeface="HK Grotesk"/>
-                <a:ea typeface="HK Grotesk"/>
-                <a:cs typeface="HK Grotesk"/>
+                <a:latin typeface="Space Grotesk"/>
+                <a:ea typeface="Space Grotesk"/>
+                <a:cs typeface="Space Grotesk"/>
               </a:rPr>
               <a:t>Chicago,</a:t>
             </a:r>
@@ -4344,7 +4344,7 @@
         </p:nvSpPr>
         <p:spPr>
           <a:xfrm>
-            <a:off x="762000" y="3882628"/>
+            <a:off x="762000" y="3977878"/>
             <a:ext cx="10368915" cy="971550"/>
           </a:xfrm>
           <a:prstGeom prst="rect">
@@ -4366,9 +4366,9 @@
                 <a:solidFill>
                   <a:srgbClr val="14161A"/>
                 </a:solidFill>
-                <a:latin typeface="HK Grotesk"/>
-                <a:ea typeface="HK Grotesk"/>
-                <a:cs typeface="HK Grotesk"/>
+                <a:latin typeface="Space Grotesk"/>
+                <a:ea typeface="Space Grotesk"/>
+                <a:cs typeface="Space Grotesk"/>
               </a:rPr>
               <a:t>by the numbers.</a:t>
             </a:r>
@@ -4383,7 +4383,7 @@
         </p:nvSpPr>
         <p:spPr>
           <a:xfrm>
-            <a:off x="1057275" y="5912644"/>
+            <a:off x="1057275" y="6045994"/>
             <a:ext cx="754142" cy="247650"/>
           </a:xfrm>
           <a:prstGeom prst="rect">
@@ -4401,9 +4401,9 @@
                 <a:solidFill>
                   <a:srgbClr val="2D5BE3"/>
                 </a:solidFill>
-                <a:latin typeface="HK Grotesk"/>
-                <a:ea typeface="HK Grotesk"/>
-                <a:cs typeface="HK Grotesk"/>
+                <a:latin typeface="Space Grotesk"/>
+                <a:ea typeface="Space Grotesk"/>
+                <a:cs typeface="Space Grotesk"/>
               </a:rPr>
               <a:t>01</a:t>
             </a:r>
@@ -4418,8 +4418,8 @@
         </p:nvSpPr>
         <p:spPr>
           <a:xfrm>
-            <a:off x="1519089" y="5641181"/>
-            <a:ext cx="11729799" cy="104775"/>
+            <a:off x="1519089" y="5736431"/>
+            <a:ext cx="11538347" cy="180975"/>
           </a:xfrm>
           <a:prstGeom prst="rect">
             <a:avLst/>
@@ -4432,7 +4432,7 @@
           <a:p>
             <a:pPr algn="l"/>
             <a:r>
-              <a:rPr sz="750" i="0" b="0" spc="240">
+              <a:rPr sz="1200" i="0" b="0" spc="384">
                 <a:solidFill>
                   <a:srgbClr val="8A8F99"/>
                 </a:solidFill>
@@ -4453,8 +4453,8 @@
         </p:nvSpPr>
         <p:spPr>
           <a:xfrm>
-            <a:off x="1519089" y="5822156"/>
-            <a:ext cx="11729799" cy="609600"/>
+            <a:off x="1519089" y="5993606"/>
+            <a:ext cx="11538347" cy="609600"/>
           </a:xfrm>
           <a:prstGeom prst="rect">
             <a:avLst/>
@@ -4475,9 +4475,9 @@
                 <a:solidFill>
                   <a:srgbClr val="14161A"/>
                 </a:solidFill>
-                <a:latin typeface="HK Grotesk"/>
-                <a:ea typeface="HK Grotesk"/>
-                <a:cs typeface="HK Grotesk"/>
+                <a:latin typeface="Space Grotesk"/>
+                <a:ea typeface="Space Grotesk"/>
+                <a:cs typeface="Space Grotesk"/>
               </a:rPr>
               <a:t>$1.12M</a:t>
             </a:r>
@@ -4492,8 +4492,8 @@
         </p:nvSpPr>
         <p:spPr>
           <a:xfrm>
-            <a:off x="8840688" y="5965031"/>
-            <a:ext cx="1003459" cy="142875"/>
+            <a:off x="8721030" y="6074569"/>
+            <a:ext cx="1194911" cy="190500"/>
           </a:xfrm>
           <a:prstGeom prst="rect">
             <a:avLst/>
@@ -4506,13 +4506,13 @@
           <a:p>
             <a:pPr algn="l"/>
             <a:r>
-              <a:rPr sz="975" i="0" b="1">
+              <a:rPr sz="1275" i="0" b="1">
                 <a:solidFill>
                   <a:srgbClr val="2D5BE3"/>
                 </a:solidFill>
-                <a:latin typeface="HK Grotesk"/>
-                <a:ea typeface="HK Grotesk"/>
-                <a:cs typeface="HK Grotesk"/>
+                <a:latin typeface="Space Grotesk"/>
+                <a:ea typeface="Space Grotesk"/>
+                <a:cs typeface="Space Grotesk"/>
               </a:rPr>
               <a:t>+ 2.8%</a:t>
             </a:r>
@@ -4527,7 +4527,7 @@
         </p:nvSpPr>
         <p:spPr>
           <a:xfrm>
-            <a:off x="1057275" y="7465219"/>
+            <a:off x="1057275" y="7674769"/>
             <a:ext cx="754142" cy="247650"/>
           </a:xfrm>
           <a:prstGeom prst="rect">
@@ -4545,9 +4545,9 @@
                 <a:solidFill>
                   <a:srgbClr val="2D5BE3"/>
                 </a:solidFill>
-                <a:latin typeface="HK Grotesk"/>
-                <a:ea typeface="HK Grotesk"/>
-                <a:cs typeface="HK Grotesk"/>
+                <a:latin typeface="Space Grotesk"/>
+                <a:ea typeface="Space Grotesk"/>
+                <a:cs typeface="Space Grotesk"/>
               </a:rPr>
               <a:t>02</a:t>
             </a:r>
@@ -4562,8 +4562,8 @@
         </p:nvSpPr>
         <p:spPr>
           <a:xfrm>
-            <a:off x="1519089" y="7193756"/>
-            <a:ext cx="11564541" cy="104775"/>
+            <a:off x="1519089" y="7365206"/>
+            <a:ext cx="11322368" cy="180975"/>
           </a:xfrm>
           <a:prstGeom prst="rect">
             <a:avLst/>
@@ -4576,7 +4576,7 @@
           <a:p>
             <a:pPr algn="l"/>
             <a:r>
-              <a:rPr sz="750" i="0" b="0" spc="240">
+              <a:rPr sz="1200" i="0" b="0" spc="384">
                 <a:solidFill>
                   <a:srgbClr val="8A8F99"/>
                 </a:solidFill>
@@ -4597,8 +4597,8 @@
         </p:nvSpPr>
         <p:spPr>
           <a:xfrm>
-            <a:off x="1519089" y="7374731"/>
-            <a:ext cx="11564541" cy="609600"/>
+            <a:off x="1519089" y="7622381"/>
+            <a:ext cx="11322368" cy="609600"/>
           </a:xfrm>
           <a:prstGeom prst="rect">
             <a:avLst/>
@@ -4619,9 +4619,9 @@
                 <a:solidFill>
                   <a:srgbClr val="14161A"/>
                 </a:solidFill>
-                <a:latin typeface="HK Grotesk"/>
-                <a:ea typeface="HK Grotesk"/>
-                <a:cs typeface="HK Grotesk"/>
+                <a:latin typeface="Space Grotesk"/>
+                <a:ea typeface="Space Grotesk"/>
+                <a:cs typeface="Space Grotesk"/>
               </a:rPr>
               <a:t>24</a:t>
             </a:r>
@@ -4636,8 +4636,8 @@
         </p:nvSpPr>
         <p:spPr>
           <a:xfrm>
-            <a:off x="8737402" y="7517606"/>
-            <a:ext cx="1168718" cy="142875"/>
+            <a:off x="8586043" y="7703344"/>
+            <a:ext cx="1410891" cy="190500"/>
           </a:xfrm>
           <a:prstGeom prst="rect">
             <a:avLst/>
@@ -4650,13 +4650,13 @@
           <a:p>
             <a:pPr algn="l"/>
             <a:r>
-              <a:rPr sz="975" i="0" b="1">
+              <a:rPr sz="1275" i="0" b="1">
                 <a:solidFill>
                   <a:srgbClr val="2D5BE3"/>
                 </a:solidFill>
-                <a:latin typeface="HK Grotesk"/>
-                <a:ea typeface="HK Grotesk"/>
-                <a:cs typeface="HK Grotesk"/>
+                <a:latin typeface="Space Grotesk"/>
+                <a:ea typeface="Space Grotesk"/>
+                <a:cs typeface="Space Grotesk"/>
               </a:rPr>
               <a:t>− 9 days</a:t>
             </a:r>
@@ -4671,7 +4671,7 @@
         </p:nvSpPr>
         <p:spPr>
           <a:xfrm>
-            <a:off x="1057275" y="9017794"/>
+            <a:off x="1057275" y="9303544"/>
             <a:ext cx="754142" cy="247650"/>
           </a:xfrm>
           <a:prstGeom prst="rect">
@@ -4689,9 +4689,9 @@
                 <a:solidFill>
                   <a:srgbClr val="2D5BE3"/>
                 </a:solidFill>
-                <a:latin typeface="HK Grotesk"/>
-                <a:ea typeface="HK Grotesk"/>
-                <a:cs typeface="HK Grotesk"/>
+                <a:latin typeface="Space Grotesk"/>
+                <a:ea typeface="Space Grotesk"/>
+                <a:cs typeface="Space Grotesk"/>
               </a:rPr>
               <a:t>03</a:t>
             </a:r>
@@ -4706,8 +4706,8 @@
         </p:nvSpPr>
         <p:spPr>
           <a:xfrm>
-            <a:off x="1519089" y="8746331"/>
-            <a:ext cx="11961019" cy="104775"/>
+            <a:off x="1519089" y="8993981"/>
+            <a:ext cx="11840766" cy="180975"/>
           </a:xfrm>
           <a:prstGeom prst="rect">
             <a:avLst/>
@@ -4720,7 +4720,7 @@
           <a:p>
             <a:pPr algn="l"/>
             <a:r>
-              <a:rPr sz="750" i="0" b="0" spc="240">
+              <a:rPr sz="1200" i="0" b="0" spc="384">
                 <a:solidFill>
                   <a:srgbClr val="8A8F99"/>
                 </a:solidFill>
@@ -4741,8 +4741,8 @@
         </p:nvSpPr>
         <p:spPr>
           <a:xfrm>
-            <a:off x="1519089" y="8927306"/>
-            <a:ext cx="11961019" cy="609600"/>
+            <a:off x="1519089" y="9251156"/>
+            <a:ext cx="11840766" cy="609600"/>
           </a:xfrm>
           <a:prstGeom prst="rect">
             <a:avLst/>
@@ -4763,9 +4763,9 @@
                 <a:solidFill>
                   <a:srgbClr val="14161A"/>
                 </a:solidFill>
-                <a:latin typeface="HK Grotesk"/>
-                <a:ea typeface="HK Grotesk"/>
-                <a:cs typeface="HK Grotesk"/>
+                <a:latin typeface="Space Grotesk"/>
+                <a:ea typeface="Space Grotesk"/>
+                <a:cs typeface="Space Grotesk"/>
               </a:rPr>
               <a:t>188</a:t>
             </a:r>
@@ -4780,8 +4780,8 @@
         </p:nvSpPr>
         <p:spPr>
           <a:xfrm>
-            <a:off x="8985200" y="9070181"/>
-            <a:ext cx="772239" cy="142875"/>
+            <a:off x="8910042" y="9332119"/>
+            <a:ext cx="892492" cy="190500"/>
           </a:xfrm>
           <a:prstGeom prst="rect">
             <a:avLst/>
@@ -4794,13 +4794,13 @@
           <a:p>
             <a:pPr algn="l"/>
             <a:r>
-              <a:rPr sz="975" i="0" b="1">
+              <a:rPr sz="1275" i="0" b="1">
                 <a:solidFill>
                   <a:srgbClr val="2D5BE3"/>
                 </a:solidFill>
-                <a:latin typeface="HK Grotesk"/>
-                <a:ea typeface="HK Grotesk"/>
-                <a:cs typeface="HK Grotesk"/>
+                <a:latin typeface="Space Grotesk"/>
+                <a:ea typeface="Space Grotesk"/>
+                <a:cs typeface="Space Grotesk"/>
               </a:rPr>
               <a:t>+ 14</a:t>
             </a:r>
@@ -4815,8 +4815,8 @@
         </p:nvSpPr>
         <p:spPr>
           <a:xfrm>
-            <a:off x="1238250" y="15978188"/>
-            <a:ext cx="2856786" cy="161925"/>
+            <a:off x="1314450" y="15825788"/>
+            <a:ext cx="4177189" cy="257175"/>
           </a:xfrm>
           <a:prstGeom prst="rect">
             <a:avLst/>
@@ -4829,13 +4829,13 @@
           <a:p>
             <a:pPr algn="l"/>
             <a:r>
-              <a:rPr sz="1125" i="0" b="1" spc="22">
+              <a:rPr sz="1725" i="0" b="1" spc="34">
                 <a:solidFill>
                   <a:srgbClr val="14161A"/>
                 </a:solidFill>
-                <a:latin typeface="HK Grotesk"/>
-                <a:ea typeface="HK Grotesk"/>
-                <a:cs typeface="HK Grotesk"/>
+                <a:latin typeface="Space Grotesk"/>
+                <a:ea typeface="Space Grotesk"/>
+                <a:cs typeface="Space Grotesk"/>
               </a:rPr>
               <a:t>Full report — tap here</a:t>
             </a:r>
@@ -4850,8 +4850,8 @@
         </p:nvSpPr>
         <p:spPr>
           <a:xfrm>
-            <a:off x="9105900" y="15954375"/>
-            <a:ext cx="609600" cy="209550"/>
+            <a:off x="9001125" y="15821025"/>
+            <a:ext cx="685800" cy="266700"/>
           </a:xfrm>
           <a:prstGeom prst="rect">
             <a:avLst/>
@@ -4864,13 +4864,13 @@
           <a:p>
             <a:pPr algn="l"/>
             <a:r>
-              <a:rPr sz="1350" i="0" b="0">
+              <a:rPr sz="1800" i="0" b="0">
                 <a:solidFill>
                   <a:srgbClr val="2D5BE3"/>
                 </a:solidFill>
-                <a:latin typeface="HK Grotesk"/>
-                <a:ea typeface="HK Grotesk"/>
-                <a:cs typeface="HK Grotesk"/>
+                <a:latin typeface="Space Grotesk"/>
+                <a:ea typeface="Space Grotesk"/>
+                <a:cs typeface="Space Grotesk"/>
               </a:rPr>
               <a:t>↗</a:t>
             </a:r>
@@ -4885,8 +4885,8 @@
         </p:nvSpPr>
         <p:spPr>
           <a:xfrm>
-            <a:off x="2557031" y="17297400"/>
-            <a:ext cx="5172789" cy="123825"/>
+            <a:off x="1468041" y="17249775"/>
+            <a:ext cx="7350919" cy="180975"/>
           </a:xfrm>
           <a:prstGeom prst="rect">
             <a:avLst/>
@@ -4899,7 +4899,7 @@
           <a:p>
             <a:pPr algn="ctr"/>
             <a:r>
-              <a:rPr sz="825" i="0" b="0" spc="264">
+              <a:rPr sz="1200" i="0" b="0" spc="384">
                 <a:solidFill>
                   <a:srgbClr val="8A8F99"/>
                 </a:solidFill>

--- a/metro/metro-s05-market-update.pptx
+++ b/metro/metro-s05-market-update.pptx
@@ -3316,8 +3316,8 @@
         </p:nvSpPr>
         <p:spPr>
           <a:xfrm>
-            <a:off x="762000" y="5441156"/>
-            <a:ext cx="8763000" cy="1457325"/>
+            <a:off x="762000" y="5450681"/>
+            <a:ext cx="8763000" cy="1485900"/>
           </a:xfrm>
           <a:prstGeom prst="rect">
             <a:avLst/>
@@ -3360,7 +3360,7 @@
         </p:nvSpPr>
         <p:spPr>
           <a:xfrm>
-            <a:off x="762000" y="5441156"/>
+            <a:off x="762000" y="5450681"/>
             <a:ext cx="8763000" cy="9525"/>
           </a:xfrm>
           <a:prstGeom prst="rect">
@@ -3404,7 +3404,7 @@
         </p:nvSpPr>
         <p:spPr>
           <a:xfrm>
-            <a:off x="762000" y="6888956"/>
+            <a:off x="762000" y="6927056"/>
             <a:ext cx="8763000" cy="9525"/>
           </a:xfrm>
           <a:prstGeom prst="rect">
@@ -3448,8 +3448,8 @@
         </p:nvSpPr>
         <p:spPr>
           <a:xfrm>
-            <a:off x="762000" y="5441156"/>
-            <a:ext cx="9525" cy="1457325"/>
+            <a:off x="762000" y="5450681"/>
+            <a:ext cx="9525" cy="1485900"/>
           </a:xfrm>
           <a:prstGeom prst="rect">
             <a:avLst/>
@@ -3492,8 +3492,8 @@
         </p:nvSpPr>
         <p:spPr>
           <a:xfrm>
-            <a:off x="9515475" y="5441156"/>
-            <a:ext cx="9525" cy="1457325"/>
+            <a:off x="9515475" y="5450681"/>
+            <a:ext cx="9525" cy="1485900"/>
           </a:xfrm>
           <a:prstGeom prst="rect">
             <a:avLst/>
@@ -3536,8 +3536,8 @@
         </p:nvSpPr>
         <p:spPr>
           <a:xfrm>
-            <a:off x="762000" y="7069931"/>
-            <a:ext cx="8763000" cy="1457325"/>
+            <a:off x="762000" y="7108031"/>
+            <a:ext cx="8763000" cy="1485900"/>
           </a:xfrm>
           <a:prstGeom prst="rect">
             <a:avLst/>
@@ -3580,7 +3580,7 @@
         </p:nvSpPr>
         <p:spPr>
           <a:xfrm>
-            <a:off x="762000" y="7069931"/>
+            <a:off x="762000" y="7108031"/>
             <a:ext cx="8763000" cy="9525"/>
           </a:xfrm>
           <a:prstGeom prst="rect">
@@ -3624,7 +3624,7 @@
         </p:nvSpPr>
         <p:spPr>
           <a:xfrm>
-            <a:off x="762000" y="8517731"/>
+            <a:off x="762000" y="8584406"/>
             <a:ext cx="8763000" cy="9525"/>
           </a:xfrm>
           <a:prstGeom prst="rect">
@@ -3668,8 +3668,8 @@
         </p:nvSpPr>
         <p:spPr>
           <a:xfrm>
-            <a:off x="762000" y="7069931"/>
-            <a:ext cx="9525" cy="1457325"/>
+            <a:off x="762000" y="7108031"/>
+            <a:ext cx="9525" cy="1485900"/>
           </a:xfrm>
           <a:prstGeom prst="rect">
             <a:avLst/>
@@ -3712,8 +3712,8 @@
         </p:nvSpPr>
         <p:spPr>
           <a:xfrm>
-            <a:off x="9515475" y="7069931"/>
-            <a:ext cx="9525" cy="1457325"/>
+            <a:off x="9515475" y="7108031"/>
+            <a:ext cx="9525" cy="1485900"/>
           </a:xfrm>
           <a:prstGeom prst="rect">
             <a:avLst/>
@@ -3756,8 +3756,8 @@
         </p:nvSpPr>
         <p:spPr>
           <a:xfrm>
-            <a:off x="762000" y="8698706"/>
-            <a:ext cx="8763000" cy="1457325"/>
+            <a:off x="762000" y="8765381"/>
+            <a:ext cx="8763000" cy="1485900"/>
           </a:xfrm>
           <a:prstGeom prst="rect">
             <a:avLst/>
@@ -3800,7 +3800,7 @@
         </p:nvSpPr>
         <p:spPr>
           <a:xfrm>
-            <a:off x="762000" y="8698706"/>
+            <a:off x="762000" y="8765381"/>
             <a:ext cx="8763000" cy="9525"/>
           </a:xfrm>
           <a:prstGeom prst="rect">
@@ -3844,7 +3844,7 @@
         </p:nvSpPr>
         <p:spPr>
           <a:xfrm>
-            <a:off x="762000" y="10146506"/>
+            <a:off x="762000" y="10241756"/>
             <a:ext cx="8763000" cy="9525"/>
           </a:xfrm>
           <a:prstGeom prst="rect">
@@ -3888,8 +3888,8 @@
         </p:nvSpPr>
         <p:spPr>
           <a:xfrm>
-            <a:off x="762000" y="8698706"/>
-            <a:ext cx="9525" cy="1457325"/>
+            <a:off x="762000" y="8765381"/>
+            <a:ext cx="9525" cy="1485900"/>
           </a:xfrm>
           <a:prstGeom prst="rect">
             <a:avLst/>
@@ -3932,8 +3932,8 @@
         </p:nvSpPr>
         <p:spPr>
           <a:xfrm>
-            <a:off x="9515475" y="8698706"/>
-            <a:ext cx="9525" cy="1457325"/>
+            <a:off x="9515475" y="8765381"/>
+            <a:ext cx="9525" cy="1485900"/>
           </a:xfrm>
           <a:prstGeom prst="rect">
             <a:avLst/>
@@ -3976,7 +3976,7 @@
         </p:nvSpPr>
         <p:spPr>
           <a:xfrm>
-            <a:off x="762000" y="15525750"/>
+            <a:off x="762000" y="15478125"/>
             <a:ext cx="8763000" cy="9525"/>
           </a:xfrm>
           <a:prstGeom prst="rect">
@@ -4064,8 +4064,8 @@
         </p:nvSpPr>
         <p:spPr>
           <a:xfrm>
-            <a:off x="762000" y="15525750"/>
-            <a:ext cx="9525" cy="857250"/>
+            <a:off x="762000" y="15478125"/>
+            <a:ext cx="9525" cy="904875"/>
           </a:xfrm>
           <a:prstGeom prst="rect">
             <a:avLst/>
@@ -4108,8 +4108,8 @@
         </p:nvSpPr>
         <p:spPr>
           <a:xfrm>
-            <a:off x="9515475" y="15525750"/>
-            <a:ext cx="9525" cy="857250"/>
+            <a:off x="9515475" y="15478125"/>
+            <a:ext cx="9525" cy="904875"/>
           </a:xfrm>
           <a:prstGeom prst="rect">
             <a:avLst/>
@@ -4152,7 +4152,7 @@
         </p:nvSpPr>
         <p:spPr>
           <a:xfrm>
-            <a:off x="1081566" y="15907229"/>
+            <a:off x="1081566" y="15883417"/>
             <a:ext cx="94293" cy="94292"/>
           </a:xfrm>
           <a:prstGeom prst="rect">
@@ -4196,8 +4196,8 @@
         </p:nvSpPr>
         <p:spPr>
           <a:xfrm>
-            <a:off x="873175" y="914400"/>
-            <a:ext cx="756523" cy="152400"/>
+            <a:off x="851148" y="900112"/>
+            <a:ext cx="827008" cy="180975"/>
           </a:xfrm>
           <a:prstGeom prst="rect">
             <a:avLst/>
@@ -4214,7 +4214,7 @@
               </a:lnSpc>
             </a:pPr>
             <a:r>
-              <a:rPr sz="1200" i="0" b="1" spc="24">
+              <a:rPr sz="1425" i="0" b="1" spc="28">
                 <a:solidFill>
                   <a:srgbClr val="14161A"/>
                 </a:solidFill>
@@ -4235,8 +4235,8 @@
         </p:nvSpPr>
         <p:spPr>
           <a:xfrm>
-            <a:off x="6574036" y="900112"/>
-            <a:ext cx="5102542" cy="180975"/>
+            <a:off x="6020693" y="885825"/>
+            <a:ext cx="5987891" cy="209550"/>
           </a:xfrm>
           <a:prstGeom prst="rect">
             <a:avLst/>
@@ -4249,7 +4249,7 @@
           <a:p>
             <a:pPr algn="l"/>
             <a:r>
-              <a:rPr sz="1200" i="0" b="0" spc="384">
+              <a:rPr sz="1425" i="0" b="0" spc="456">
                 <a:solidFill>
                   <a:srgbClr val="8A8F99"/>
                 </a:solidFill>
@@ -4271,7 +4271,7 @@
         <p:spPr>
           <a:xfrm>
             <a:off x="762000" y="2857500"/>
-            <a:ext cx="14401800" cy="228600"/>
+            <a:ext cx="14401800" cy="238125"/>
           </a:xfrm>
           <a:prstGeom prst="rect">
             <a:avLst/>
@@ -4284,7 +4284,7 @@
           <a:p>
             <a:pPr algn="l"/>
             <a:r>
-              <a:rPr sz="1575" i="0" b="0" spc="472">
+              <a:rPr sz="1650" i="0" b="0" spc="462">
                 <a:solidFill>
                   <a:srgbClr val="2D5BE3"/>
                 </a:solidFill>
@@ -4305,7 +4305,7 @@
         </p:nvSpPr>
         <p:spPr>
           <a:xfrm>
-            <a:off x="762000" y="3171825"/>
+            <a:off x="762000" y="3181350"/>
             <a:ext cx="5852874" cy="971550"/>
           </a:xfrm>
           <a:prstGeom prst="rect">
@@ -4344,7 +4344,7 @@
         </p:nvSpPr>
         <p:spPr>
           <a:xfrm>
-            <a:off x="762000" y="3977878"/>
+            <a:off x="762000" y="3987403"/>
             <a:ext cx="10368915" cy="971550"/>
           </a:xfrm>
           <a:prstGeom prst="rect">
@@ -4383,7 +4383,7 @@
         </p:nvSpPr>
         <p:spPr>
           <a:xfrm>
-            <a:off x="1057275" y="6045994"/>
+            <a:off x="1057275" y="6069806"/>
             <a:ext cx="754142" cy="247650"/>
           </a:xfrm>
           <a:prstGeom prst="rect">
@@ -4418,8 +4418,8 @@
         </p:nvSpPr>
         <p:spPr>
           <a:xfrm>
-            <a:off x="1519089" y="5736431"/>
-            <a:ext cx="11538347" cy="180975"/>
+            <a:off x="1519089" y="5745956"/>
+            <a:ext cx="11442621" cy="209550"/>
           </a:xfrm>
           <a:prstGeom prst="rect">
             <a:avLst/>
@@ -4432,7 +4432,7 @@
           <a:p>
             <a:pPr algn="l"/>
             <a:r>
-              <a:rPr sz="1200" i="0" b="0" spc="384">
+              <a:rPr sz="1425" i="0" b="0" spc="456">
                 <a:solidFill>
                   <a:srgbClr val="8A8F99"/>
                 </a:solidFill>
@@ -4453,8 +4453,8 @@
         </p:nvSpPr>
         <p:spPr>
           <a:xfrm>
-            <a:off x="1519089" y="5993606"/>
-            <a:ext cx="11538347" cy="609600"/>
+            <a:off x="1519089" y="6031706"/>
+            <a:ext cx="11442621" cy="609600"/>
           </a:xfrm>
           <a:prstGeom prst="rect">
             <a:avLst/>
@@ -4492,8 +4492,8 @@
         </p:nvSpPr>
         <p:spPr>
           <a:xfrm>
-            <a:off x="8721030" y="6074569"/>
-            <a:ext cx="1194911" cy="190500"/>
+            <a:off x="8661202" y="6088856"/>
+            <a:ext cx="1290638" cy="209550"/>
           </a:xfrm>
           <a:prstGeom prst="rect">
             <a:avLst/>
@@ -4506,7 +4506,7 @@
           <a:p>
             <a:pPr algn="l"/>
             <a:r>
-              <a:rPr sz="1275" i="0" b="1">
+              <a:rPr sz="1425" i="0" b="1">
                 <a:solidFill>
                   <a:srgbClr val="2D5BE3"/>
                 </a:solidFill>
@@ -4527,7 +4527,7 @@
         </p:nvSpPr>
         <p:spPr>
           <a:xfrm>
-            <a:off x="1057275" y="7674769"/>
+            <a:off x="1057275" y="7727156"/>
             <a:ext cx="754142" cy="247650"/>
           </a:xfrm>
           <a:prstGeom prst="rect">
@@ -4562,8 +4562,8 @@
         </p:nvSpPr>
         <p:spPr>
           <a:xfrm>
-            <a:off x="1519089" y="7365206"/>
-            <a:ext cx="11322368" cy="180975"/>
+            <a:off x="1519089" y="7403306"/>
+            <a:ext cx="11201162" cy="209550"/>
           </a:xfrm>
           <a:prstGeom prst="rect">
             <a:avLst/>
@@ -4576,7 +4576,7 @@
           <a:p>
             <a:pPr algn="l"/>
             <a:r>
-              <a:rPr sz="1200" i="0" b="0" spc="384">
+              <a:rPr sz="1425" i="0" b="0" spc="456">
                 <a:solidFill>
                   <a:srgbClr val="8A8F99"/>
                 </a:solidFill>
@@ -4597,8 +4597,8 @@
         </p:nvSpPr>
         <p:spPr>
           <a:xfrm>
-            <a:off x="1519089" y="7622381"/>
-            <a:ext cx="11322368" cy="609600"/>
+            <a:off x="1519089" y="7689056"/>
+            <a:ext cx="11201162" cy="609600"/>
           </a:xfrm>
           <a:prstGeom prst="rect">
             <a:avLst/>
@@ -4636,8 +4636,8 @@
         </p:nvSpPr>
         <p:spPr>
           <a:xfrm>
-            <a:off x="8586043" y="7703344"/>
-            <a:ext cx="1410891" cy="190500"/>
+            <a:off x="8510290" y="7746206"/>
+            <a:ext cx="1532096" cy="209550"/>
           </a:xfrm>
           <a:prstGeom prst="rect">
             <a:avLst/>
@@ -4650,7 +4650,7 @@
           <a:p>
             <a:pPr algn="l"/>
             <a:r>
-              <a:rPr sz="1275" i="0" b="1">
+              <a:rPr sz="1425" i="0" b="1">
                 <a:solidFill>
                   <a:srgbClr val="2D5BE3"/>
                 </a:solidFill>
@@ -4671,7 +4671,7 @@
         </p:nvSpPr>
         <p:spPr>
           <a:xfrm>
-            <a:off x="1057275" y="9303544"/>
+            <a:off x="1057275" y="9384506"/>
             <a:ext cx="754142" cy="247650"/>
           </a:xfrm>
           <a:prstGeom prst="rect">
@@ -4706,8 +4706,8 @@
         </p:nvSpPr>
         <p:spPr>
           <a:xfrm>
-            <a:off x="1519089" y="8993981"/>
-            <a:ext cx="11840766" cy="180975"/>
+            <a:off x="1519089" y="9060656"/>
+            <a:ext cx="11780520" cy="209550"/>
           </a:xfrm>
           <a:prstGeom prst="rect">
             <a:avLst/>
@@ -4720,7 +4720,7 @@
           <a:p>
             <a:pPr algn="l"/>
             <a:r>
-              <a:rPr sz="1200" i="0" b="0" spc="384">
+              <a:rPr sz="1425" i="0" b="0" spc="456">
                 <a:solidFill>
                   <a:srgbClr val="8A8F99"/>
                 </a:solidFill>
@@ -4741,8 +4741,8 @@
         </p:nvSpPr>
         <p:spPr>
           <a:xfrm>
-            <a:off x="1519089" y="9251156"/>
-            <a:ext cx="11840766" cy="609600"/>
+            <a:off x="1519089" y="9346406"/>
+            <a:ext cx="11780520" cy="609600"/>
           </a:xfrm>
           <a:prstGeom prst="rect">
             <a:avLst/>
@@ -4780,8 +4780,8 @@
         </p:nvSpPr>
         <p:spPr>
           <a:xfrm>
-            <a:off x="8910042" y="9332119"/>
-            <a:ext cx="892492" cy="190500"/>
+            <a:off x="8872389" y="9403556"/>
+            <a:ext cx="952738" cy="209550"/>
           </a:xfrm>
           <a:prstGeom prst="rect">
             <a:avLst/>
@@ -4794,7 +4794,7 @@
           <a:p>
             <a:pPr algn="l"/>
             <a:r>
-              <a:rPr sz="1275" i="0" b="1">
+              <a:rPr sz="1425" i="0" b="1">
                 <a:solidFill>
                   <a:srgbClr val="2D5BE3"/>
                 </a:solidFill>
@@ -4815,8 +4815,8 @@
         </p:nvSpPr>
         <p:spPr>
           <a:xfrm>
-            <a:off x="1314450" y="15825788"/>
-            <a:ext cx="4177189" cy="257175"/>
+            <a:off x="1314450" y="15782925"/>
+            <a:ext cx="4837509" cy="295275"/>
           </a:xfrm>
           <a:prstGeom prst="rect">
             <a:avLst/>
@@ -4829,7 +4829,7 @@
           <a:p>
             <a:pPr algn="l"/>
             <a:r>
-              <a:rPr sz="1725" i="0" b="1" spc="34">
+              <a:rPr sz="2025" i="0" b="1" spc="40">
                 <a:solidFill>
                   <a:srgbClr val="14161A"/>
                 </a:solidFill>
@@ -4850,8 +4850,8 @@
         </p:nvSpPr>
         <p:spPr>
           <a:xfrm>
-            <a:off x="9001125" y="15821025"/>
-            <a:ext cx="685800" cy="266700"/>
+            <a:off x="8972550" y="15773400"/>
+            <a:ext cx="731520" cy="314325"/>
           </a:xfrm>
           <a:prstGeom prst="rect">
             <a:avLst/>
@@ -4864,7 +4864,7 @@
           <a:p>
             <a:pPr algn="l"/>
             <a:r>
-              <a:rPr sz="1800" i="0" b="0">
+              <a:rPr sz="2100" i="0" b="0">
                 <a:solidFill>
                   <a:srgbClr val="2D5BE3"/>
                 </a:solidFill>
@@ -4885,8 +4885,8 @@
         </p:nvSpPr>
         <p:spPr>
           <a:xfrm>
-            <a:off x="1468041" y="17249775"/>
-            <a:ext cx="7350919" cy="180975"/>
+            <a:off x="814626" y="17221200"/>
+            <a:ext cx="8657749" cy="209550"/>
           </a:xfrm>
           <a:prstGeom prst="rect">
             <a:avLst/>
@@ -4899,7 +4899,7 @@
           <a:p>
             <a:pPr algn="ctr"/>
             <a:r>
-              <a:rPr sz="1200" i="0" b="0" spc="384">
+              <a:rPr sz="1425" i="0" b="0" spc="456">
                 <a:solidFill>
                   <a:srgbClr val="8A8F99"/>
                 </a:solidFill>
